--- a/presentation/KS_Report_September_2026.pptx
+++ b/presentation/KS_Report_September_2026.pptx
@@ -12,6 +12,7 @@
     <p:sldId id="260" r:id="rId11"/>
     <p:sldId id="261" r:id="rId12"/>
     <p:sldId id="262" r:id="rId13"/>
+    <p:sldId id="263" r:id="rId14"/>
   </p:sldIdLst>
   <p:sldSz cx="12191695" cy="6858000" type="screen4x3"/>
   <p:notesSz cx="6858000" cy="9144000"/>
@@ -3413,7 +3414,7 @@
                 <a:cs typeface="Verdana"/>
               </a:rPr>
               <a:t>Базы, конверсии проработки и результаты менеджеров.
-Отдельные слайды — кейс успешной продажи и место под кейс пилота.</a:t>
+Кейсы продажи и пилота + выводы: что двигает клиента к покупке.</a:t>
             </a:r>
           </a:p>
         </p:txBody>
@@ -5484,7 +5485,7 @@
                 <a:ea typeface="Verdana"/>
                 <a:cs typeface="Verdana"/>
               </a:rPr>
-              <a:t>2 / 7</a:t>
+              <a:t>2 / 8</a:t>
             </a:r>
           </a:p>
         </p:txBody>
@@ -15535,7 +15536,7 @@
                 <a:ea typeface="Verdana"/>
                 <a:cs typeface="Verdana"/>
               </a:rPr>
-              <a:t>3 / 7</a:t>
+              <a:t>3 / 8</a:t>
             </a:r>
           </a:p>
         </p:txBody>
@@ -16684,7 +16685,7 @@
                 <a:ea typeface="Verdana"/>
                 <a:cs typeface="Verdana"/>
               </a:rPr>
-              <a:t>4 / 7</a:t>
+              <a:t>4 / 8</a:t>
             </a:r>
           </a:p>
         </p:txBody>
@@ -18310,7 +18311,7 @@
                 <a:ea typeface="Verdana"/>
                 <a:cs typeface="Verdana"/>
               </a:rPr>
-              <a:t>5 / 7</a:t>
+              <a:t>5 / 8</a:t>
             </a:r>
           </a:p>
         </p:txBody>
@@ -19255,7 +19256,7 @@
                 <a:ea typeface="Verdana"/>
                 <a:cs typeface="Verdana"/>
               </a:rPr>
-              <a:t>6 / 7</a:t>
+              <a:t>6 / 8</a:t>
             </a:r>
           </a:p>
         </p:txBody>
@@ -19472,7 +19473,7 @@
                 <a:ea typeface="Verdana"/>
                 <a:cs typeface="Verdana"/>
               </a:rPr>
-              <a:t>Успешный пилот — слайд-заготовка</a:t>
+              <a:t>ООО «ЦЗ» (Центр зрения) — согласие на пилот</a:t>
             </a:r>
           </a:p>
         </p:txBody>
@@ -19528,12 +19529,94 @@
         </p:nvSpPr>
         <p:spPr>
           <a:xfrm>
-            <a:off x="457200" y="1737360"/>
-            <a:ext cx="11247120" cy="4297680"/>
+            <a:off x="457200" y="1554480"/>
+            <a:ext cx="11247120" cy="640080"/>
           </a:xfrm>
           <a:prstGeom prst="roundRect">
             <a:avLst>
-              <a:gd name="adj" fmla="val 10000"/>
+              <a:gd name="adj" fmla="val 8000"/>
+            </a:avLst>
+          </a:prstGeom>
+          <a:solidFill>
+            <a:srgbClr val="FECF68"/>
+          </a:solidFill>
+          <a:ln>
+            <a:noFill/>
+          </a:ln>
+        </p:spPr>
+        <p:style>
+          <a:lnRef idx="1">
+            <a:schemeClr val="accent1"/>
+          </a:lnRef>
+          <a:fillRef idx="3">
+            <a:schemeClr val="accent1"/>
+          </a:fillRef>
+          <a:effectRef idx="2">
+            <a:schemeClr val="accent1"/>
+          </a:effectRef>
+          <a:fontRef idx="minor">
+            <a:schemeClr val="lt1"/>
+          </a:fontRef>
+        </p:style>
+        <p:txBody>
+          <a:bodyPr rtlCol="0" anchor="ctr"/>
+          <a:lstStyle/>
+          <a:p>
+            <a:pPr algn="ctr"/>
+          </a:p>
+        </p:txBody>
+      </p:sp>
+      <p:sp>
+        <p:nvSpPr>
+          <p:cNvPr id="11" name="TextBox 10"/>
+          <p:cNvSpPr txBox="1"/>
+          <p:nvPr/>
+        </p:nvSpPr>
+        <p:spPr>
+          <a:xfrm>
+            <a:off x="640080" y="1627632"/>
+            <a:ext cx="10972800" cy="502920"/>
+          </a:xfrm>
+          <a:prstGeom prst="rect">
+            <a:avLst/>
+          </a:prstGeom>
+          <a:noFill/>
+        </p:spPr>
+        <p:txBody>
+          <a:bodyPr wrap="square" anchor="ctr">
+            <a:spAutoFit/>
+          </a:bodyPr>
+          <a:lstStyle/>
+          <a:p>
+            <a:pPr algn="l"/>
+            <a:r>
+              <a:rPr sz="1300" b="1">
+                <a:solidFill>
+                  <a:srgbClr val="1A1A1A"/>
+                </a:solidFill>
+                <a:latin typeface="Verdana"/>
+                <a:ea typeface="Verdana"/>
+                <a:cs typeface="Verdana"/>
+              </a:rPr>
+              <a:t>Клиент: ООО «ЦЗ» · Центр зрения · Долгая проработка · Есть сотрудники · Интерес к ЭДО</a:t>
+            </a:r>
+          </a:p>
+        </p:txBody>
+      </p:sp>
+      <p:sp>
+        <p:nvSpPr>
+          <p:cNvPr id="12" name="Rounded Rectangle 11"/>
+          <p:cNvSpPr/>
+          <p:nvPr/>
+        </p:nvSpPr>
+        <p:spPr>
+          <a:xfrm>
+            <a:off x="457200" y="2331720"/>
+            <a:ext cx="11247120" cy="1115568"/>
+          </a:xfrm>
+          <a:prstGeom prst="roundRect">
+            <a:avLst>
+              <a:gd name="adj" fmla="val 8000"/>
             </a:avLst>
           </a:prstGeom>
           <a:solidFill>
@@ -19567,14 +19650,14 @@
       </p:sp>
       <p:sp>
         <p:nvSpPr>
-          <p:cNvPr id="11" name="Rectangle 10"/>
+          <p:cNvPr id="13" name="Rectangle 12"/>
           <p:cNvSpPr/>
           <p:nvPr/>
         </p:nvSpPr>
         <p:spPr>
           <a:xfrm>
-            <a:off x="457200" y="1737360"/>
-            <a:ext cx="11247120" cy="109728"/>
+            <a:off x="457200" y="2331720"/>
+            <a:ext cx="109728" cy="1115568"/>
           </a:xfrm>
           <a:prstGeom prst="rect">
             <a:avLst/>
@@ -19610,14 +19693,14 @@
       </p:sp>
       <p:sp>
         <p:nvSpPr>
-          <p:cNvPr id="12" name="TextBox 11"/>
-          <p:cNvSpPr txBox="1"/>
-          <p:nvPr/>
-        </p:nvSpPr>
-        <p:spPr>
-          <a:xfrm>
-            <a:off x="822960" y="2194560"/>
-            <a:ext cx="10515600" cy="457200"/>
+          <p:cNvPr id="14" name="TextBox 13"/>
+          <p:cNvSpPr txBox="1"/>
+          <p:nvPr/>
+        </p:nvSpPr>
+        <p:spPr>
+          <a:xfrm>
+            <a:off x="777240" y="2441448"/>
+            <a:ext cx="10698480" cy="256032"/>
           </a:xfrm>
           <a:prstGeom prst="rect">
             <a:avLst/>
@@ -19630,9 +19713,46 @@
           </a:bodyPr>
           <a:lstStyle/>
           <a:p>
-            <a:pPr algn="ctr"/>
-            <a:r>
-              <a:rPr sz="2000" b="1">
+            <a:pPr algn="l"/>
+            <a:r>
+              <a:rPr sz="1400" b="1">
+                <a:solidFill>
+                  <a:srgbClr val="395F75"/>
+                </a:solidFill>
+                <a:latin typeface="Verdana"/>
+                <a:ea typeface="Verdana"/>
+                <a:cs typeface="Verdana"/>
+              </a:rPr>
+              <a:t>Контекст</a:t>
+            </a:r>
+          </a:p>
+        </p:txBody>
+      </p:sp>
+      <p:sp>
+        <p:nvSpPr>
+          <p:cNvPr id="15" name="TextBox 14"/>
+          <p:cNvSpPr txBox="1"/>
+          <p:nvPr/>
+        </p:nvSpPr>
+        <p:spPr>
+          <a:xfrm>
+            <a:off x="777240" y="2715768"/>
+            <a:ext cx="10698480" cy="594360"/>
+          </a:xfrm>
+          <a:prstGeom prst="rect">
+            <a:avLst/>
+          </a:prstGeom>
+          <a:noFill/>
+        </p:spPr>
+        <p:txBody>
+          <a:bodyPr wrap="square" anchor="t">
+            <a:spAutoFit/>
+          </a:bodyPr>
+          <a:lstStyle/>
+          <a:p>
+            <a:pPr algn="l"/>
+            <a:r>
+              <a:rPr sz="1300" b="0">
                 <a:solidFill>
                   <a:srgbClr val="1A1A1A"/>
                 </a:solidFill>
@@ -19640,67 +19760,69 @@
                 <a:ea typeface="Verdana"/>
                 <a:cs typeface="Verdana"/>
               </a:rPr>
-              <a:t>Описание кейса успешного пилота будет добавлено позже</a:t>
-            </a:r>
-          </a:p>
-        </p:txBody>
-      </p:sp>
-      <p:sp>
-        <p:nvSpPr>
-          <p:cNvPr id="13" name="TextBox 12"/>
-          <p:cNvSpPr txBox="1"/>
-          <p:nvPr/>
-        </p:nvSpPr>
-        <p:spPr>
-          <a:xfrm>
-            <a:off x="1371600" y="2926080"/>
-            <a:ext cx="9418320" cy="2011680"/>
-          </a:xfrm>
-          <a:prstGeom prst="rect">
-            <a:avLst/>
-          </a:prstGeom>
-          <a:noFill/>
-        </p:spPr>
-        <p:txBody>
-          <a:bodyPr wrap="square" anchor="t">
-            <a:spAutoFit/>
-          </a:bodyPr>
-          <a:lstStyle/>
-          <a:p>
-            <a:pPr algn="l"/>
-            <a:r>
-              <a:rPr sz="1500" b="0">
-                <a:solidFill>
-                  <a:srgbClr val="5C5C5C"/>
-                </a:solidFill>
-                <a:latin typeface="Verdana"/>
-                <a:ea typeface="Verdana"/>
-                <a:cs typeface="Verdana"/>
-              </a:rPr>
-              <a:t>Сюда перенесём:
-• клиента и источник базы
-• как договорились о пилоте на 3 месяца
-• что показали / подключили
-• чем пилот подтвердил ценность и какой следующий шаг к покупке</a:t>
-            </a:r>
-          </a:p>
-        </p:txBody>
-      </p:sp>
-      <p:sp>
-        <p:nvSpPr>
-          <p:cNvPr id="14" name="Rounded Rectangle 13"/>
+              <a:t>Клиента обрабатывали долго. Уже был пробный период, но попользоваться сервисом по-настоящему не успели — поэтому интерес не «закрылся», а остался открытым.</a:t>
+            </a:r>
+          </a:p>
+        </p:txBody>
+      </p:sp>
+      <p:sp>
+        <p:nvSpPr>
+          <p:cNvPr id="16" name="Rounded Rectangle 15"/>
           <p:cNvSpPr/>
           <p:nvPr/>
         </p:nvSpPr>
         <p:spPr>
           <a:xfrm>
-            <a:off x="3200400" y="5120640"/>
-            <a:ext cx="5760720" cy="640080"/>
+            <a:off x="457200" y="3566160"/>
+            <a:ext cx="11247120" cy="1115568"/>
           </a:xfrm>
           <a:prstGeom prst="roundRect">
             <a:avLst>
-              <a:gd name="adj" fmla="val 10000"/>
+              <a:gd name="adj" fmla="val 8000"/>
             </a:avLst>
+          </a:prstGeom>
+          <a:solidFill>
+            <a:srgbClr val="FFFCF6"/>
+          </a:solidFill>
+          <a:ln>
+            <a:noFill/>
+          </a:ln>
+        </p:spPr>
+        <p:style>
+          <a:lnRef idx="1">
+            <a:schemeClr val="accent1"/>
+          </a:lnRef>
+          <a:fillRef idx="3">
+            <a:schemeClr val="accent1"/>
+          </a:fillRef>
+          <a:effectRef idx="2">
+            <a:schemeClr val="accent1"/>
+          </a:effectRef>
+          <a:fontRef idx="minor">
+            <a:schemeClr val="lt1"/>
+          </a:fontRef>
+        </p:style>
+        <p:txBody>
+          <a:bodyPr rtlCol="0" anchor="ctr"/>
+          <a:lstStyle/>
+          <a:p>
+            <a:pPr algn="ctr"/>
+          </a:p>
+        </p:txBody>
+      </p:sp>
+      <p:sp>
+        <p:nvSpPr>
+          <p:cNvPr id="17" name="Rectangle 16"/>
+          <p:cNvSpPr/>
+          <p:nvPr/>
+        </p:nvSpPr>
+        <p:spPr>
+          <a:xfrm>
+            <a:off x="457200" y="3566160"/>
+            <a:ext cx="109728" cy="1115568"/>
+          </a:xfrm>
+          <a:prstGeom prst="rect">
+            <a:avLst/>
           </a:prstGeom>
           <a:solidFill>
             <a:srgbClr val="FECF68"/>
@@ -19733,51 +19855,133 @@
       </p:sp>
       <p:sp>
         <p:nvSpPr>
-          <p:cNvPr id="15" name="TextBox 14"/>
-          <p:cNvSpPr txBox="1"/>
-          <p:nvPr/>
-        </p:nvSpPr>
-        <p:spPr>
-          <a:xfrm>
-            <a:off x="3200400" y="5120640"/>
-            <a:ext cx="5760720" cy="640080"/>
-          </a:xfrm>
-          <a:prstGeom prst="rect">
-            <a:avLst/>
-          </a:prstGeom>
-          <a:noFill/>
-        </p:spPr>
-        <p:txBody>
-          <a:bodyPr wrap="square" anchor="ctr">
-            <a:spAutoFit/>
-          </a:bodyPr>
-          <a:lstStyle/>
-          <a:p>
-            <a:pPr algn="ctr"/>
+          <p:cNvPr id="18" name="TextBox 17"/>
+          <p:cNvSpPr txBox="1"/>
+          <p:nvPr/>
+        </p:nvSpPr>
+        <p:spPr>
+          <a:xfrm>
+            <a:off x="777240" y="3675888"/>
+            <a:ext cx="10698480" cy="256032"/>
+          </a:xfrm>
+          <a:prstGeom prst="rect">
+            <a:avLst/>
+          </a:prstGeom>
+          <a:noFill/>
+        </p:spPr>
+        <p:txBody>
+          <a:bodyPr wrap="square" anchor="t">
+            <a:spAutoFit/>
+          </a:bodyPr>
+          <a:lstStyle/>
+          <a:p>
+            <a:pPr algn="l"/>
             <a:r>
               <a:rPr sz="1400" b="1">
                 <a:solidFill>
+                  <a:srgbClr val="395F75"/>
+                </a:solidFill>
+                <a:latin typeface="Verdana"/>
+                <a:ea typeface="Verdana"/>
+                <a:cs typeface="Verdana"/>
+              </a:rPr>
+              <a:t>Что цепляет</a:t>
+            </a:r>
+          </a:p>
+        </p:txBody>
+      </p:sp>
+      <p:sp>
+        <p:nvSpPr>
+          <p:cNvPr id="19" name="TextBox 18"/>
+          <p:cNvSpPr txBox="1"/>
+          <p:nvPr/>
+        </p:nvSpPr>
+        <p:spPr>
+          <a:xfrm>
+            <a:off x="777240" y="3950208"/>
+            <a:ext cx="10698480" cy="594360"/>
+          </a:xfrm>
+          <a:prstGeom prst="rect">
+            <a:avLst/>
+          </a:prstGeom>
+          <a:noFill/>
+        </p:spPr>
+        <p:txBody>
+          <a:bodyPr wrap="square" anchor="t">
+            <a:spAutoFit/>
+          </a:bodyPr>
+          <a:lstStyle/>
+          <a:p>
+            <a:pPr algn="l"/>
+            <a:r>
+              <a:rPr sz="1300" b="0">
+                <a:solidFill>
                   <a:srgbClr val="1A1A1A"/>
                 </a:solidFill>
                 <a:latin typeface="Verdana"/>
                 <a:ea typeface="Verdana"/>
                 <a:cs typeface="Verdana"/>
               </a:rPr>
-              <a:t>Статус: ждём текст кейса</a:t>
-            </a:r>
-          </a:p>
-        </p:txBody>
-      </p:sp>
-      <p:sp>
-        <p:nvSpPr>
-          <p:cNvPr id="16" name="Rectangle 15"/>
+              <a:t>В компании есть сотрудники, которым нужен кадровый контур. Нравится идея электронного документооборота: меньше бумаги, понятные процессы, автоматизация.</a:t>
+            </a:r>
+          </a:p>
+        </p:txBody>
+      </p:sp>
+      <p:sp>
+        <p:nvSpPr>
+          <p:cNvPr id="20" name="Rounded Rectangle 19"/>
           <p:cNvSpPr/>
           <p:nvPr/>
         </p:nvSpPr>
         <p:spPr>
           <a:xfrm>
-            <a:off x="0" y="6656832"/>
-            <a:ext cx="12191695" cy="201168"/>
+            <a:off x="457200" y="4800600"/>
+            <a:ext cx="11247120" cy="1115568"/>
+          </a:xfrm>
+          <a:prstGeom prst="roundRect">
+            <a:avLst>
+              <a:gd name="adj" fmla="val 8000"/>
+            </a:avLst>
+          </a:prstGeom>
+          <a:solidFill>
+            <a:srgbClr val="FFF8E8"/>
+          </a:solidFill>
+          <a:ln>
+            <a:noFill/>
+          </a:ln>
+        </p:spPr>
+        <p:style>
+          <a:lnRef idx="1">
+            <a:schemeClr val="accent1"/>
+          </a:lnRef>
+          <a:fillRef idx="3">
+            <a:schemeClr val="accent1"/>
+          </a:fillRef>
+          <a:effectRef idx="2">
+            <a:schemeClr val="accent1"/>
+          </a:effectRef>
+          <a:fontRef idx="minor">
+            <a:schemeClr val="lt1"/>
+          </a:fontRef>
+        </p:style>
+        <p:txBody>
+          <a:bodyPr rtlCol="0" anchor="ctr"/>
+          <a:lstStyle/>
+          <a:p>
+            <a:pPr algn="ctr"/>
+          </a:p>
+        </p:txBody>
+      </p:sp>
+      <p:sp>
+        <p:nvSpPr>
+          <p:cNvPr id="21" name="Rectangle 20"/>
+          <p:cNvSpPr/>
+          <p:nvPr/>
+        </p:nvSpPr>
+        <p:spPr>
+          <a:xfrm>
+            <a:off x="457200" y="4800600"/>
+            <a:ext cx="109728" cy="1115568"/>
           </a:xfrm>
           <a:prstGeom prst="rect">
             <a:avLst/>
@@ -19813,7 +20017,124 @@
       </p:sp>
       <p:sp>
         <p:nvSpPr>
-          <p:cNvPr id="17" name="TextBox 16"/>
+          <p:cNvPr id="22" name="TextBox 21"/>
+          <p:cNvSpPr txBox="1"/>
+          <p:nvPr/>
+        </p:nvSpPr>
+        <p:spPr>
+          <a:xfrm>
+            <a:off x="777240" y="4910328"/>
+            <a:ext cx="10698480" cy="256032"/>
+          </a:xfrm>
+          <a:prstGeom prst="rect">
+            <a:avLst/>
+          </a:prstGeom>
+          <a:noFill/>
+        </p:spPr>
+        <p:txBody>
+          <a:bodyPr wrap="square" anchor="t">
+            <a:spAutoFit/>
+          </a:bodyPr>
+          <a:lstStyle/>
+          <a:p>
+            <a:pPr algn="l"/>
+            <a:r>
+              <a:rPr sz="1400" b="1">
+                <a:solidFill>
+                  <a:srgbClr val="395F75"/>
+                </a:solidFill>
+                <a:latin typeface="Verdana"/>
+                <a:ea typeface="Verdana"/>
+                <a:cs typeface="Verdana"/>
+              </a:rPr>
+              <a:t>Почему пилот</a:t>
+            </a:r>
+          </a:p>
+        </p:txBody>
+      </p:sp>
+      <p:sp>
+        <p:nvSpPr>
+          <p:cNvPr id="23" name="TextBox 22"/>
+          <p:cNvSpPr txBox="1"/>
+          <p:nvPr/>
+        </p:nvSpPr>
+        <p:spPr>
+          <a:xfrm>
+            <a:off x="777240" y="5184648"/>
+            <a:ext cx="10698480" cy="594360"/>
+          </a:xfrm>
+          <a:prstGeom prst="rect">
+            <a:avLst/>
+          </a:prstGeom>
+          <a:noFill/>
+        </p:spPr>
+        <p:txBody>
+          <a:bodyPr wrap="square" anchor="t">
+            <a:spAutoFit/>
+          </a:bodyPr>
+          <a:lstStyle/>
+          <a:p>
+            <a:pPr algn="l"/>
+            <a:r>
+              <a:rPr sz="1300" b="0">
+                <a:solidFill>
+                  <a:srgbClr val="1A1A1A"/>
+                </a:solidFill>
+                <a:latin typeface="Verdana"/>
+                <a:ea typeface="Verdana"/>
+                <a:cs typeface="Verdana"/>
+              </a:rPr>
+              <a:t>На пилот согласились именно потому, что на демо / в пробном периоде не успели «прожить» сервис руками. Сервис интересен — нужен спокойный срок, чтобы проверить в работе и принять решение о покупке.</a:t>
+            </a:r>
+          </a:p>
+        </p:txBody>
+      </p:sp>
+      <p:sp>
+        <p:nvSpPr>
+          <p:cNvPr id="24" name="Rectangle 23"/>
+          <p:cNvSpPr/>
+          <p:nvPr/>
+        </p:nvSpPr>
+        <p:spPr>
+          <a:xfrm>
+            <a:off x="0" y="6656832"/>
+            <a:ext cx="12191695" cy="201168"/>
+          </a:xfrm>
+          <a:prstGeom prst="rect">
+            <a:avLst/>
+          </a:prstGeom>
+          <a:solidFill>
+            <a:srgbClr val="FECF68"/>
+          </a:solidFill>
+          <a:ln>
+            <a:noFill/>
+          </a:ln>
+        </p:spPr>
+        <p:style>
+          <a:lnRef idx="1">
+            <a:schemeClr val="accent1"/>
+          </a:lnRef>
+          <a:fillRef idx="3">
+            <a:schemeClr val="accent1"/>
+          </a:fillRef>
+          <a:effectRef idx="2">
+            <a:schemeClr val="accent1"/>
+          </a:effectRef>
+          <a:fontRef idx="minor">
+            <a:schemeClr val="lt1"/>
+          </a:fontRef>
+        </p:style>
+        <p:txBody>
+          <a:bodyPr rtlCol="0" anchor="ctr"/>
+          <a:lstStyle/>
+          <a:p>
+            <a:pPr algn="ctr"/>
+          </a:p>
+        </p:txBody>
+      </p:sp>
+      <p:sp>
+        <p:nvSpPr>
+          <p:cNvPr id="25" name="TextBox 24"/>
           <p:cNvSpPr txBox="1"/>
           <p:nvPr/>
         </p:nvSpPr>
@@ -19850,7 +20171,7 @@
       </p:sp>
       <p:sp>
         <p:nvSpPr>
-          <p:cNvPr id="18" name="TextBox 17"/>
+          <p:cNvPr id="26" name="TextBox 25"/>
           <p:cNvSpPr txBox="1"/>
           <p:nvPr/>
         </p:nvSpPr>
@@ -19880,7 +20201,1357 @@
                 <a:ea typeface="Verdana"/>
                 <a:cs typeface="Verdana"/>
               </a:rPr>
-              <a:t>7 / 7</a:t>
+              <a:t>7 / 8</a:t>
+            </a:r>
+          </a:p>
+        </p:txBody>
+      </p:sp>
+    </p:spTree>
+  </p:cSld>
+  <p:clrMapOvr>
+    <a:masterClrMapping/>
+  </p:clrMapOvr>
+</p:sld>
+</file>
+
+<file path=ppt/slides/slide8.xml><?xml version="1.0" encoding="utf-8"?>
+<p:sld xmlns:a="http://schemas.openxmlformats.org/drawingml/2006/main" xmlns:p="http://schemas.openxmlformats.org/presentationml/2006/main" xmlns:r="http://schemas.openxmlformats.org/officeDocument/2006/relationships">
+  <p:cSld>
+    <p:spTree>
+      <p:nvGrpSpPr>
+        <p:cNvPr id="1" name=""/>
+        <p:cNvGrpSpPr/>
+        <p:nvPr/>
+      </p:nvGrpSpPr>
+      <p:grpSpPr/>
+      <p:sp>
+        <p:nvSpPr>
+          <p:cNvPr id="2" name="Vertical Title 1"/>
+          <p:cNvSpPr>
+            <a:spLocks noGrp="1"/>
+          </p:cNvSpPr>
+          <p:nvPr>
+            <p:ph type="title" orient="vert"/>
+          </p:nvPr>
+        </p:nvSpPr>
+        <p:spPr/>
+        <p:txBody>
+          <a:bodyPr/>
+          <a:lstStyle/>
+          <a:p/>
+        </p:txBody>
+      </p:sp>
+      <p:sp>
+        <p:nvSpPr>
+          <p:cNvPr id="3" name="Vertical Text Placeholder 2"/>
+          <p:cNvSpPr>
+            <a:spLocks noGrp="1"/>
+          </p:cNvSpPr>
+          <p:nvPr>
+            <p:ph type="body" idx="1" orient="vert"/>
+          </p:nvPr>
+        </p:nvSpPr>
+        <p:spPr/>
+        <p:txBody>
+          <a:bodyPr/>
+          <a:lstStyle/>
+          <a:p/>
+        </p:txBody>
+      </p:sp>
+      <p:sp>
+        <p:nvSpPr>
+          <p:cNvPr id="4" name="Rectangle 3"/>
+          <p:cNvSpPr/>
+          <p:nvPr/>
+        </p:nvSpPr>
+        <p:spPr>
+          <a:xfrm>
+            <a:off x="0" y="0"/>
+            <a:ext cx="12191695" cy="6858000"/>
+          </a:xfrm>
+          <a:prstGeom prst="rect">
+            <a:avLst/>
+          </a:prstGeom>
+          <a:solidFill>
+            <a:srgbClr val="FFFFFF"/>
+          </a:solidFill>
+          <a:ln>
+            <a:noFill/>
+          </a:ln>
+        </p:spPr>
+        <p:style>
+          <a:lnRef idx="1">
+            <a:schemeClr val="accent1"/>
+          </a:lnRef>
+          <a:fillRef idx="3">
+            <a:schemeClr val="accent1"/>
+          </a:fillRef>
+          <a:effectRef idx="2">
+            <a:schemeClr val="accent1"/>
+          </a:effectRef>
+          <a:fontRef idx="minor">
+            <a:schemeClr val="lt1"/>
+          </a:fontRef>
+        </p:style>
+        <p:txBody>
+          <a:bodyPr rtlCol="0" anchor="ctr"/>
+          <a:lstStyle/>
+          <a:p>
+            <a:pPr algn="ctr"/>
+          </a:p>
+        </p:txBody>
+      </p:sp>
+      <p:pic>
+        <p:nvPicPr>
+          <p:cNvPr id="5" name="Picture 4" descr="logo-forus.png"/>
+          <p:cNvPicPr>
+            <a:picLocks noChangeAspect="1"/>
+          </p:cNvPicPr>
+          <p:nvPr/>
+        </p:nvPicPr>
+        <p:blipFill>
+          <a:blip r:embed="rId2"/>
+          <a:stretch>
+            <a:fillRect/>
+          </a:stretch>
+        </p:blipFill>
+        <p:spPr>
+          <a:xfrm>
+            <a:off x="457200" y="201168"/>
+            <a:ext cx="980049" cy="347472"/>
+          </a:xfrm>
+          <a:prstGeom prst="rect">
+            <a:avLst/>
+          </a:prstGeom>
+        </p:spPr>
+      </p:pic>
+      <p:pic>
+        <p:nvPicPr>
+          <p:cNvPr id="6" name="Picture 5" descr="wave_tr.png"/>
+          <p:cNvPicPr>
+            <a:picLocks noChangeAspect="1"/>
+          </p:cNvPicPr>
+          <p:nvPr/>
+        </p:nvPicPr>
+        <p:blipFill>
+          <a:blip r:embed="rId3"/>
+          <a:stretch>
+            <a:fillRect/>
+          </a:stretch>
+        </p:blipFill>
+        <p:spPr>
+          <a:xfrm>
+            <a:off x="9646920" y="-45720"/>
+            <a:ext cx="2651760" cy="883920"/>
+          </a:xfrm>
+          <a:prstGeom prst="rect">
+            <a:avLst/>
+          </a:prstGeom>
+        </p:spPr>
+      </p:pic>
+      <p:sp>
+        <p:nvSpPr>
+          <p:cNvPr id="7" name="TextBox 6"/>
+          <p:cNvSpPr txBox="1"/>
+          <p:nvPr/>
+        </p:nvSpPr>
+        <p:spPr>
+          <a:xfrm>
+            <a:off x="457200" y="658368"/>
+            <a:ext cx="11155680" cy="256032"/>
+          </a:xfrm>
+          <a:prstGeom prst="rect">
+            <a:avLst/>
+          </a:prstGeom>
+          <a:noFill/>
+        </p:spPr>
+        <p:txBody>
+          <a:bodyPr wrap="square" anchor="t">
+            <a:spAutoFit/>
+          </a:bodyPr>
+          <a:lstStyle/>
+          <a:p>
+            <a:pPr algn="l"/>
+            <a:r>
+              <a:rPr sz="1100" b="1">
+                <a:solidFill>
+                  <a:srgbClr val="395F75"/>
+                </a:solidFill>
+                <a:latin typeface="Verdana"/>
+                <a:ea typeface="Verdana"/>
+                <a:cs typeface="Verdana"/>
+              </a:rPr>
+              <a:t>7. Выводы</a:t>
+            </a:r>
+          </a:p>
+        </p:txBody>
+      </p:sp>
+      <p:sp>
+        <p:nvSpPr>
+          <p:cNvPr id="8" name="TextBox 7"/>
+          <p:cNvSpPr txBox="1"/>
+          <p:nvPr/>
+        </p:nvSpPr>
+        <p:spPr>
+          <a:xfrm>
+            <a:off x="457200" y="896112"/>
+            <a:ext cx="11155680" cy="502920"/>
+          </a:xfrm>
+          <a:prstGeom prst="rect">
+            <a:avLst/>
+          </a:prstGeom>
+          <a:noFill/>
+        </p:spPr>
+        <p:txBody>
+          <a:bodyPr wrap="square" anchor="t">
+            <a:spAutoFit/>
+          </a:bodyPr>
+          <a:lstStyle/>
+          <a:p>
+            <a:pPr algn="l"/>
+            <a:r>
+              <a:rPr sz="2200" b="1">
+                <a:solidFill>
+                  <a:srgbClr val="1A1A1A"/>
+                </a:solidFill>
+                <a:latin typeface="Verdana"/>
+                <a:ea typeface="Verdana"/>
+                <a:cs typeface="Verdana"/>
+              </a:rPr>
+              <a:t>Что двигает клиента купить Кабинет сотрудника</a:t>
+            </a:r>
+          </a:p>
+        </p:txBody>
+      </p:sp>
+      <p:sp>
+        <p:nvSpPr>
+          <p:cNvPr id="9" name="Rectangle 8"/>
+          <p:cNvSpPr/>
+          <p:nvPr/>
+        </p:nvSpPr>
+        <p:spPr>
+          <a:xfrm>
+            <a:off x="457200" y="1389888"/>
+            <a:ext cx="1234440" cy="64008"/>
+          </a:xfrm>
+          <a:prstGeom prst="rect">
+            <a:avLst/>
+          </a:prstGeom>
+          <a:solidFill>
+            <a:srgbClr val="FECF68"/>
+          </a:solidFill>
+          <a:ln>
+            <a:noFill/>
+          </a:ln>
+        </p:spPr>
+        <p:style>
+          <a:lnRef idx="1">
+            <a:schemeClr val="accent1"/>
+          </a:lnRef>
+          <a:fillRef idx="3">
+            <a:schemeClr val="accent1"/>
+          </a:fillRef>
+          <a:effectRef idx="2">
+            <a:schemeClr val="accent1"/>
+          </a:effectRef>
+          <a:fontRef idx="minor">
+            <a:schemeClr val="lt1"/>
+          </a:fontRef>
+        </p:style>
+        <p:txBody>
+          <a:bodyPr rtlCol="0" anchor="ctr"/>
+          <a:lstStyle/>
+          <a:p>
+            <a:pPr algn="ctr"/>
+          </a:p>
+        </p:txBody>
+      </p:sp>
+      <p:sp>
+        <p:nvSpPr>
+          <p:cNvPr id="10" name="TextBox 9"/>
+          <p:cNvSpPr txBox="1"/>
+          <p:nvPr/>
+        </p:nvSpPr>
+        <p:spPr>
+          <a:xfrm>
+            <a:off x="457200" y="1481328"/>
+            <a:ext cx="11247120" cy="365760"/>
+          </a:xfrm>
+          <a:prstGeom prst="rect">
+            <a:avLst/>
+          </a:prstGeom>
+          <a:noFill/>
+        </p:spPr>
+        <p:txBody>
+          <a:bodyPr wrap="square" anchor="t">
+            <a:spAutoFit/>
+          </a:bodyPr>
+          <a:lstStyle/>
+          <a:p>
+            <a:pPr algn="l"/>
+            <a:r>
+              <a:rPr sz="1300" b="0">
+                <a:solidFill>
+                  <a:srgbClr val="5C5C5C"/>
+                </a:solidFill>
+                <a:latin typeface="Verdana"/>
+                <a:ea typeface="Verdana"/>
+                <a:cs typeface="Verdana"/>
+              </a:rPr>
+              <a:t>По кейсам ООО «СМ» (продажа) и ООО «ЦЗ» (пилот). Общее: интерес к автоматизации и электронным процессам.</a:t>
+            </a:r>
+          </a:p>
+        </p:txBody>
+      </p:sp>
+      <p:sp>
+        <p:nvSpPr>
+          <p:cNvPr id="11" name="Rounded Rectangle 10"/>
+          <p:cNvSpPr/>
+          <p:nvPr/>
+        </p:nvSpPr>
+        <p:spPr>
+          <a:xfrm>
+            <a:off x="457200" y="1920240"/>
+            <a:ext cx="3657600" cy="2011680"/>
+          </a:xfrm>
+          <a:prstGeom prst="roundRect">
+            <a:avLst>
+              <a:gd name="adj" fmla="val 10000"/>
+            </a:avLst>
+          </a:prstGeom>
+          <a:solidFill>
+            <a:srgbClr val="FFF8E8"/>
+          </a:solidFill>
+          <a:ln>
+            <a:noFill/>
+          </a:ln>
+        </p:spPr>
+        <p:style>
+          <a:lnRef idx="1">
+            <a:schemeClr val="accent1"/>
+          </a:lnRef>
+          <a:fillRef idx="3">
+            <a:schemeClr val="accent1"/>
+          </a:fillRef>
+          <a:effectRef idx="2">
+            <a:schemeClr val="accent1"/>
+          </a:effectRef>
+          <a:fontRef idx="minor">
+            <a:schemeClr val="lt1"/>
+          </a:fontRef>
+        </p:style>
+        <p:txBody>
+          <a:bodyPr rtlCol="0" anchor="ctr"/>
+          <a:lstStyle/>
+          <a:p>
+            <a:pPr algn="ctr"/>
+          </a:p>
+        </p:txBody>
+      </p:sp>
+      <p:sp>
+        <p:nvSpPr>
+          <p:cNvPr id="12" name="TextBox 11"/>
+          <p:cNvSpPr txBox="1"/>
+          <p:nvPr/>
+        </p:nvSpPr>
+        <p:spPr>
+          <a:xfrm>
+            <a:off x="640080" y="2057400"/>
+            <a:ext cx="3291840" cy="320040"/>
+          </a:xfrm>
+          <a:prstGeom prst="rect">
+            <a:avLst/>
+          </a:prstGeom>
+          <a:noFill/>
+        </p:spPr>
+        <p:txBody>
+          <a:bodyPr wrap="square" anchor="t">
+            <a:spAutoFit/>
+          </a:bodyPr>
+          <a:lstStyle/>
+          <a:p>
+            <a:pPr algn="l"/>
+            <a:r>
+              <a:rPr sz="1600" b="1">
+                <a:solidFill>
+                  <a:srgbClr val="E8B43A"/>
+                </a:solidFill>
+                <a:latin typeface="Verdana"/>
+                <a:ea typeface="Verdana"/>
+                <a:cs typeface="Verdana"/>
+              </a:rPr>
+              <a:t>01</a:t>
+            </a:r>
+          </a:p>
+        </p:txBody>
+      </p:sp>
+      <p:sp>
+        <p:nvSpPr>
+          <p:cNvPr id="13" name="TextBox 12"/>
+          <p:cNvSpPr txBox="1"/>
+          <p:nvPr/>
+        </p:nvSpPr>
+        <p:spPr>
+          <a:xfrm>
+            <a:off x="640080" y="2377440"/>
+            <a:ext cx="3291840" cy="502920"/>
+          </a:xfrm>
+          <a:prstGeom prst="rect">
+            <a:avLst/>
+          </a:prstGeom>
+          <a:noFill/>
+        </p:spPr>
+        <p:txBody>
+          <a:bodyPr wrap="square" anchor="t">
+            <a:spAutoFit/>
+          </a:bodyPr>
+          <a:lstStyle/>
+          <a:p>
+            <a:pPr algn="l"/>
+            <a:r>
+              <a:rPr sz="1400" b="1">
+                <a:solidFill>
+                  <a:srgbClr val="1A1A1A"/>
+                </a:solidFill>
+                <a:latin typeface="Verdana"/>
+                <a:ea typeface="Verdana"/>
+                <a:cs typeface="Verdana"/>
+              </a:rPr>
+              <a:t>Уже «болит» бумага / кадры</a:t>
+            </a:r>
+          </a:p>
+        </p:txBody>
+      </p:sp>
+      <p:sp>
+        <p:nvSpPr>
+          <p:cNvPr id="14" name="TextBox 13"/>
+          <p:cNvSpPr txBox="1"/>
+          <p:nvPr/>
+        </p:nvSpPr>
+        <p:spPr>
+          <a:xfrm>
+            <a:off x="640080" y="2926080"/>
+            <a:ext cx="3291840" cy="822960"/>
+          </a:xfrm>
+          <a:prstGeom prst="rect">
+            <a:avLst/>
+          </a:prstGeom>
+          <a:noFill/>
+        </p:spPr>
+        <p:txBody>
+          <a:bodyPr wrap="square" anchor="t">
+            <a:spAutoFit/>
+          </a:bodyPr>
+          <a:lstStyle/>
+          <a:p>
+            <a:pPr algn="l"/>
+            <a:r>
+              <a:rPr sz="1200" b="0">
+                <a:solidFill>
+                  <a:srgbClr val="5C5C5C"/>
+                </a:solidFill>
+                <a:latin typeface="Verdana"/>
+                <a:ea typeface="Verdana"/>
+                <a:cs typeface="Verdana"/>
+              </a:rPr>
+              <a:t>Есть сотрудники и живой кадровый контур. Клиент чувствует рутину заявлений, подписей, согласований — и ищет, как упростить.</a:t>
+            </a:r>
+          </a:p>
+        </p:txBody>
+      </p:sp>
+      <p:sp>
+        <p:nvSpPr>
+          <p:cNvPr id="15" name="Rounded Rectangle 14"/>
+          <p:cNvSpPr/>
+          <p:nvPr/>
+        </p:nvSpPr>
+        <p:spPr>
+          <a:xfrm>
+            <a:off x="4297680" y="1920240"/>
+            <a:ext cx="3657600" cy="2011680"/>
+          </a:xfrm>
+          <a:prstGeom prst="roundRect">
+            <a:avLst>
+              <a:gd name="adj" fmla="val 10000"/>
+            </a:avLst>
+          </a:prstGeom>
+          <a:solidFill>
+            <a:srgbClr val="FFFCF6"/>
+          </a:solidFill>
+          <a:ln>
+            <a:noFill/>
+          </a:ln>
+        </p:spPr>
+        <p:style>
+          <a:lnRef idx="1">
+            <a:schemeClr val="accent1"/>
+          </a:lnRef>
+          <a:fillRef idx="3">
+            <a:schemeClr val="accent1"/>
+          </a:fillRef>
+          <a:effectRef idx="2">
+            <a:schemeClr val="accent1"/>
+          </a:effectRef>
+          <a:fontRef idx="minor">
+            <a:schemeClr val="lt1"/>
+          </a:fontRef>
+        </p:style>
+        <p:txBody>
+          <a:bodyPr rtlCol="0" anchor="ctr"/>
+          <a:lstStyle/>
+          <a:p>
+            <a:pPr algn="ctr"/>
+          </a:p>
+        </p:txBody>
+      </p:sp>
+      <p:sp>
+        <p:nvSpPr>
+          <p:cNvPr id="16" name="TextBox 15"/>
+          <p:cNvSpPr txBox="1"/>
+          <p:nvPr/>
+        </p:nvSpPr>
+        <p:spPr>
+          <a:xfrm>
+            <a:off x="4480560" y="2057400"/>
+            <a:ext cx="3291840" cy="320040"/>
+          </a:xfrm>
+          <a:prstGeom prst="rect">
+            <a:avLst/>
+          </a:prstGeom>
+          <a:noFill/>
+        </p:spPr>
+        <p:txBody>
+          <a:bodyPr wrap="square" anchor="t">
+            <a:spAutoFit/>
+          </a:bodyPr>
+          <a:lstStyle/>
+          <a:p>
+            <a:pPr algn="l"/>
+            <a:r>
+              <a:rPr sz="1600" b="1">
+                <a:solidFill>
+                  <a:srgbClr val="E8B43A"/>
+                </a:solidFill>
+                <a:latin typeface="Verdana"/>
+                <a:ea typeface="Verdana"/>
+                <a:cs typeface="Verdana"/>
+              </a:rPr>
+              <a:t>02</a:t>
+            </a:r>
+          </a:p>
+        </p:txBody>
+      </p:sp>
+      <p:sp>
+        <p:nvSpPr>
+          <p:cNvPr id="17" name="TextBox 16"/>
+          <p:cNvSpPr txBox="1"/>
+          <p:nvPr/>
+        </p:nvSpPr>
+        <p:spPr>
+          <a:xfrm>
+            <a:off x="4480560" y="2377440"/>
+            <a:ext cx="3291840" cy="502920"/>
+          </a:xfrm>
+          <a:prstGeom prst="rect">
+            <a:avLst/>
+          </a:prstGeom>
+          <a:noFill/>
+        </p:spPr>
+        <p:txBody>
+          <a:bodyPr wrap="square" anchor="t">
+            <a:spAutoFit/>
+          </a:bodyPr>
+          <a:lstStyle/>
+          <a:p>
+            <a:pPr algn="l"/>
+            <a:r>
+              <a:rPr sz="1400" b="1">
+                <a:solidFill>
+                  <a:srgbClr val="1A1A1A"/>
+                </a:solidFill>
+                <a:latin typeface="Verdana"/>
+                <a:ea typeface="Verdana"/>
+                <a:cs typeface="Verdana"/>
+              </a:rPr>
+              <a:t>Тяга к ЭДО и автоматизации</a:t>
+            </a:r>
+          </a:p>
+        </p:txBody>
+      </p:sp>
+      <p:sp>
+        <p:nvSpPr>
+          <p:cNvPr id="18" name="TextBox 17"/>
+          <p:cNvSpPr txBox="1"/>
+          <p:nvPr/>
+        </p:nvSpPr>
+        <p:spPr>
+          <a:xfrm>
+            <a:off x="4480560" y="2926080"/>
+            <a:ext cx="3291840" cy="822960"/>
+          </a:xfrm>
+          <a:prstGeom prst="rect">
+            <a:avLst/>
+          </a:prstGeom>
+          <a:noFill/>
+        </p:spPr>
+        <p:txBody>
+          <a:bodyPr wrap="square" anchor="t">
+            <a:spAutoFit/>
+          </a:bodyPr>
+          <a:lstStyle/>
+          <a:p>
+            <a:pPr algn="l"/>
+            <a:r>
+              <a:rPr sz="1200" b="0">
+                <a:solidFill>
+                  <a:srgbClr val="5C5C5C"/>
+                </a:solidFill>
+                <a:latin typeface="Verdana"/>
+                <a:ea typeface="Verdana"/>
+                <a:cs typeface="Verdana"/>
+              </a:rPr>
+              <a:t>Не спорят с идеей «всё в электронном виде». Готовы слушать сервис, который встраивается в 1С и не ломает привычный учёт.</a:t>
+            </a:r>
+          </a:p>
+        </p:txBody>
+      </p:sp>
+      <p:sp>
+        <p:nvSpPr>
+          <p:cNvPr id="19" name="Rounded Rectangle 18"/>
+          <p:cNvSpPr/>
+          <p:nvPr/>
+        </p:nvSpPr>
+        <p:spPr>
+          <a:xfrm>
+            <a:off x="8138160" y="1920240"/>
+            <a:ext cx="3657600" cy="2011680"/>
+          </a:xfrm>
+          <a:prstGeom prst="roundRect">
+            <a:avLst>
+              <a:gd name="adj" fmla="val 10000"/>
+            </a:avLst>
+          </a:prstGeom>
+          <a:solidFill>
+            <a:srgbClr val="FFF8E8"/>
+          </a:solidFill>
+          <a:ln>
+            <a:noFill/>
+          </a:ln>
+        </p:spPr>
+        <p:style>
+          <a:lnRef idx="1">
+            <a:schemeClr val="accent1"/>
+          </a:lnRef>
+          <a:fillRef idx="3">
+            <a:schemeClr val="accent1"/>
+          </a:fillRef>
+          <a:effectRef idx="2">
+            <a:schemeClr val="accent1"/>
+          </a:effectRef>
+          <a:fontRef idx="minor">
+            <a:schemeClr val="lt1"/>
+          </a:fontRef>
+        </p:style>
+        <p:txBody>
+          <a:bodyPr rtlCol="0" anchor="ctr"/>
+          <a:lstStyle/>
+          <a:p>
+            <a:pPr algn="ctr"/>
+          </a:p>
+        </p:txBody>
+      </p:sp>
+      <p:sp>
+        <p:nvSpPr>
+          <p:cNvPr id="20" name="TextBox 19"/>
+          <p:cNvSpPr txBox="1"/>
+          <p:nvPr/>
+        </p:nvSpPr>
+        <p:spPr>
+          <a:xfrm>
+            <a:off x="8321040" y="2057400"/>
+            <a:ext cx="3291840" cy="320040"/>
+          </a:xfrm>
+          <a:prstGeom prst="rect">
+            <a:avLst/>
+          </a:prstGeom>
+          <a:noFill/>
+        </p:spPr>
+        <p:txBody>
+          <a:bodyPr wrap="square" anchor="t">
+            <a:spAutoFit/>
+          </a:bodyPr>
+          <a:lstStyle/>
+          <a:p>
+            <a:pPr algn="l"/>
+            <a:r>
+              <a:rPr sz="1600" b="1">
+                <a:solidFill>
+                  <a:srgbClr val="E8B43A"/>
+                </a:solidFill>
+                <a:latin typeface="Verdana"/>
+                <a:ea typeface="Verdana"/>
+                <a:cs typeface="Verdana"/>
+              </a:rPr>
+              <a:t>03</a:t>
+            </a:r>
+          </a:p>
+        </p:txBody>
+      </p:sp>
+      <p:sp>
+        <p:nvSpPr>
+          <p:cNvPr id="21" name="TextBox 20"/>
+          <p:cNvSpPr txBox="1"/>
+          <p:nvPr/>
+        </p:nvSpPr>
+        <p:spPr>
+          <a:xfrm>
+            <a:off x="8321040" y="2377440"/>
+            <a:ext cx="3291840" cy="502920"/>
+          </a:xfrm>
+          <a:prstGeom prst="rect">
+            <a:avLst/>
+          </a:prstGeom>
+          <a:noFill/>
+        </p:spPr>
+        <p:txBody>
+          <a:bodyPr wrap="square" anchor="t">
+            <a:spAutoFit/>
+          </a:bodyPr>
+          <a:lstStyle/>
+          <a:p>
+            <a:pPr algn="l"/>
+            <a:r>
+              <a:rPr sz="1400" b="1">
+                <a:solidFill>
+                  <a:srgbClr val="1A1A1A"/>
+                </a:solidFill>
+                <a:latin typeface="Verdana"/>
+                <a:ea typeface="Verdana"/>
+                <a:cs typeface="Verdana"/>
+              </a:rPr>
+              <a:t>Понять ценность на себе</a:t>
+            </a:r>
+          </a:p>
+        </p:txBody>
+      </p:sp>
+      <p:sp>
+        <p:nvSpPr>
+          <p:cNvPr id="22" name="TextBox 21"/>
+          <p:cNvSpPr txBox="1"/>
+          <p:nvPr/>
+        </p:nvSpPr>
+        <p:spPr>
+          <a:xfrm>
+            <a:off x="8321040" y="2926080"/>
+            <a:ext cx="3291840" cy="822960"/>
+          </a:xfrm>
+          <a:prstGeom prst="rect">
+            <a:avLst/>
+          </a:prstGeom>
+          <a:noFill/>
+        </p:spPr>
+        <p:txBody>
+          <a:bodyPr wrap="square" anchor="t">
+            <a:spAutoFit/>
+          </a:bodyPr>
+          <a:lstStyle/>
+          <a:p>
+            <a:pPr algn="l"/>
+            <a:r>
+              <a:rPr sz="1200" b="0">
+                <a:solidFill>
+                  <a:srgbClr val="5C5C5C"/>
+                </a:solidFill>
+                <a:latin typeface="Verdana"/>
+                <a:ea typeface="Verdana"/>
+                <a:cs typeface="Verdana"/>
+              </a:rPr>
+              <a:t>Решение зреет после живого контакта: демо у «СМ», пилот у «ЦЗ». Если не успели попробовать — оставляют дверь открытой через пилот.</a:t>
+            </a:r>
+          </a:p>
+        </p:txBody>
+      </p:sp>
+      <p:sp>
+        <p:nvSpPr>
+          <p:cNvPr id="23" name="Rounded Rectangle 22"/>
+          <p:cNvSpPr/>
+          <p:nvPr/>
+        </p:nvSpPr>
+        <p:spPr>
+          <a:xfrm>
+            <a:off x="457200" y="4069080"/>
+            <a:ext cx="3657600" cy="2011680"/>
+          </a:xfrm>
+          <a:prstGeom prst="roundRect">
+            <a:avLst>
+              <a:gd name="adj" fmla="val 10000"/>
+            </a:avLst>
+          </a:prstGeom>
+          <a:solidFill>
+            <a:srgbClr val="FFFCF6"/>
+          </a:solidFill>
+          <a:ln>
+            <a:noFill/>
+          </a:ln>
+        </p:spPr>
+        <p:style>
+          <a:lnRef idx="1">
+            <a:schemeClr val="accent1"/>
+          </a:lnRef>
+          <a:fillRef idx="3">
+            <a:schemeClr val="accent1"/>
+          </a:fillRef>
+          <a:effectRef idx="2">
+            <a:schemeClr val="accent1"/>
+          </a:effectRef>
+          <a:fontRef idx="minor">
+            <a:schemeClr val="lt1"/>
+          </a:fontRef>
+        </p:style>
+        <p:txBody>
+          <a:bodyPr rtlCol="0" anchor="ctr"/>
+          <a:lstStyle/>
+          <a:p>
+            <a:pPr algn="ctr"/>
+          </a:p>
+        </p:txBody>
+      </p:sp>
+      <p:sp>
+        <p:nvSpPr>
+          <p:cNvPr id="24" name="TextBox 23"/>
+          <p:cNvSpPr txBox="1"/>
+          <p:nvPr/>
+        </p:nvSpPr>
+        <p:spPr>
+          <a:xfrm>
+            <a:off x="640080" y="4206240"/>
+            <a:ext cx="3291840" cy="320040"/>
+          </a:xfrm>
+          <a:prstGeom prst="rect">
+            <a:avLst/>
+          </a:prstGeom>
+          <a:noFill/>
+        </p:spPr>
+        <p:txBody>
+          <a:bodyPr wrap="square" anchor="t">
+            <a:spAutoFit/>
+          </a:bodyPr>
+          <a:lstStyle/>
+          <a:p>
+            <a:pPr algn="l"/>
+            <a:r>
+              <a:rPr sz="1600" b="1">
+                <a:solidFill>
+                  <a:srgbClr val="E8B43A"/>
+                </a:solidFill>
+                <a:latin typeface="Verdana"/>
+                <a:ea typeface="Verdana"/>
+                <a:cs typeface="Verdana"/>
+              </a:rPr>
+              <a:t>04</a:t>
+            </a:r>
+          </a:p>
+        </p:txBody>
+      </p:sp>
+      <p:sp>
+        <p:nvSpPr>
+          <p:cNvPr id="25" name="TextBox 24"/>
+          <p:cNvSpPr txBox="1"/>
+          <p:nvPr/>
+        </p:nvSpPr>
+        <p:spPr>
+          <a:xfrm>
+            <a:off x="640080" y="4526280"/>
+            <a:ext cx="3291840" cy="502920"/>
+          </a:xfrm>
+          <a:prstGeom prst="rect">
+            <a:avLst/>
+          </a:prstGeom>
+          <a:noFill/>
+        </p:spPr>
+        <p:txBody>
+          <a:bodyPr wrap="square" anchor="t">
+            <a:spAutoFit/>
+          </a:bodyPr>
+          <a:lstStyle/>
+          <a:p>
+            <a:pPr algn="l"/>
+            <a:r>
+              <a:rPr sz="1400" b="1">
+                <a:solidFill>
+                  <a:srgbClr val="1A1A1A"/>
+                </a:solidFill>
+                <a:latin typeface="Verdana"/>
+                <a:ea typeface="Verdana"/>
+                <a:cs typeface="Verdana"/>
+              </a:rPr>
+              <a:t>Правильный ЛПР внутри</a:t>
+            </a:r>
+          </a:p>
+        </p:txBody>
+      </p:sp>
+      <p:sp>
+        <p:nvSpPr>
+          <p:cNvPr id="26" name="TextBox 25"/>
+          <p:cNvSpPr txBox="1"/>
+          <p:nvPr/>
+        </p:nvSpPr>
+        <p:spPr>
+          <a:xfrm>
+            <a:off x="640080" y="5074920"/>
+            <a:ext cx="3291840" cy="822960"/>
+          </a:xfrm>
+          <a:prstGeom prst="rect">
+            <a:avLst/>
+          </a:prstGeom>
+          <a:noFill/>
+        </p:spPr>
+        <p:txBody>
+          <a:bodyPr wrap="square" anchor="t">
+            <a:spAutoFit/>
+          </a:bodyPr>
+          <a:lstStyle/>
+          <a:p>
+            <a:pPr algn="l"/>
+            <a:r>
+              <a:rPr sz="1200" b="0">
+                <a:solidFill>
+                  <a:srgbClr val="5C5C5C"/>
+                </a:solidFill>
+                <a:latin typeface="Verdana"/>
+                <a:ea typeface="Verdana"/>
+                <a:cs typeface="Verdana"/>
+              </a:rPr>
+              <a:t>У «СМ» бухгалтер открыла дверь, купили кадры/ЛПР на демо. Нужно рано выяснять: кто реально решает по КЭДО и кадрам.</a:t>
+            </a:r>
+          </a:p>
+        </p:txBody>
+      </p:sp>
+      <p:sp>
+        <p:nvSpPr>
+          <p:cNvPr id="27" name="Rounded Rectangle 26"/>
+          <p:cNvSpPr/>
+          <p:nvPr/>
+        </p:nvSpPr>
+        <p:spPr>
+          <a:xfrm>
+            <a:off x="4297680" y="4069080"/>
+            <a:ext cx="3657600" cy="2011680"/>
+          </a:xfrm>
+          <a:prstGeom prst="roundRect">
+            <a:avLst>
+              <a:gd name="adj" fmla="val 10000"/>
+            </a:avLst>
+          </a:prstGeom>
+          <a:solidFill>
+            <a:srgbClr val="FFF8E8"/>
+          </a:solidFill>
+          <a:ln>
+            <a:noFill/>
+          </a:ln>
+        </p:spPr>
+        <p:style>
+          <a:lnRef idx="1">
+            <a:schemeClr val="accent1"/>
+          </a:lnRef>
+          <a:fillRef idx="3">
+            <a:schemeClr val="accent1"/>
+          </a:fillRef>
+          <a:effectRef idx="2">
+            <a:schemeClr val="accent1"/>
+          </a:effectRef>
+          <a:fontRef idx="minor">
+            <a:schemeClr val="lt1"/>
+          </a:fontRef>
+        </p:style>
+        <p:txBody>
+          <a:bodyPr rtlCol="0" anchor="ctr"/>
+          <a:lstStyle/>
+          <a:p>
+            <a:pPr algn="ctr"/>
+          </a:p>
+        </p:txBody>
+      </p:sp>
+      <p:sp>
+        <p:nvSpPr>
+          <p:cNvPr id="28" name="TextBox 27"/>
+          <p:cNvSpPr txBox="1"/>
+          <p:nvPr/>
+        </p:nvSpPr>
+        <p:spPr>
+          <a:xfrm>
+            <a:off x="4480560" y="4206240"/>
+            <a:ext cx="3291840" cy="320040"/>
+          </a:xfrm>
+          <a:prstGeom prst="rect">
+            <a:avLst/>
+          </a:prstGeom>
+          <a:noFill/>
+        </p:spPr>
+        <p:txBody>
+          <a:bodyPr wrap="square" anchor="t">
+            <a:spAutoFit/>
+          </a:bodyPr>
+          <a:lstStyle/>
+          <a:p>
+            <a:pPr algn="l"/>
+            <a:r>
+              <a:rPr sz="1600" b="1">
+                <a:solidFill>
+                  <a:srgbClr val="E8B43A"/>
+                </a:solidFill>
+                <a:latin typeface="Verdana"/>
+                <a:ea typeface="Verdana"/>
+                <a:cs typeface="Verdana"/>
+              </a:rPr>
+              <a:t>05</a:t>
+            </a:r>
+          </a:p>
+        </p:txBody>
+      </p:sp>
+      <p:sp>
+        <p:nvSpPr>
+          <p:cNvPr id="29" name="TextBox 28"/>
+          <p:cNvSpPr txBox="1"/>
+          <p:nvPr/>
+        </p:nvSpPr>
+        <p:spPr>
+          <a:xfrm>
+            <a:off x="4480560" y="4526280"/>
+            <a:ext cx="3291840" cy="502920"/>
+          </a:xfrm>
+          <a:prstGeom prst="rect">
+            <a:avLst/>
+          </a:prstGeom>
+          <a:noFill/>
+        </p:spPr>
+        <p:txBody>
+          <a:bodyPr wrap="square" anchor="t">
+            <a:spAutoFit/>
+          </a:bodyPr>
+          <a:lstStyle/>
+          <a:p>
+            <a:pPr algn="l"/>
+            <a:r>
+              <a:rPr sz="1400" b="1">
+                <a:solidFill>
+                  <a:srgbClr val="1A1A1A"/>
+                </a:solidFill>
+                <a:latin typeface="Verdana"/>
+                <a:ea typeface="Verdana"/>
+                <a:cs typeface="Verdana"/>
+              </a:rPr>
+              <a:t>Повод связаться без «холода»</a:t>
+            </a:r>
+          </a:p>
+        </p:txBody>
+      </p:sp>
+      <p:sp>
+        <p:nvSpPr>
+          <p:cNvPr id="30" name="TextBox 29"/>
+          <p:cNvSpPr txBox="1"/>
+          <p:nvPr/>
+        </p:nvSpPr>
+        <p:spPr>
+          <a:xfrm>
+            <a:off x="4480560" y="5074920"/>
+            <a:ext cx="3291840" cy="822960"/>
+          </a:xfrm>
+          <a:prstGeom prst="rect">
+            <a:avLst/>
+          </a:prstGeom>
+          <a:noFill/>
+        </p:spPr>
+        <p:txBody>
+          <a:bodyPr wrap="square" anchor="t">
+            <a:spAutoFit/>
+          </a:bodyPr>
+          <a:lstStyle/>
+          <a:p>
+            <a:pPr algn="l"/>
+            <a:r>
+              <a:rPr sz="1200" b="0">
+                <a:solidFill>
+                  <a:srgbClr val="5C5C5C"/>
+                </a:solidFill>
+                <a:latin typeface="Verdana"/>
+                <a:ea typeface="Verdana"/>
+                <a:cs typeface="Verdana"/>
+              </a:rPr>
+              <a:t>Напоминание про неизрасходованные услуги ЗУП, прошлое касание, долгая проработка — снижают барьер и дают право на разговор про Кабинет.</a:t>
+            </a:r>
+          </a:p>
+        </p:txBody>
+      </p:sp>
+      <p:sp>
+        <p:nvSpPr>
+          <p:cNvPr id="31" name="Rounded Rectangle 30"/>
+          <p:cNvSpPr/>
+          <p:nvPr/>
+        </p:nvSpPr>
+        <p:spPr>
+          <a:xfrm>
+            <a:off x="8138160" y="4069080"/>
+            <a:ext cx="3657600" cy="2011680"/>
+          </a:xfrm>
+          <a:prstGeom prst="roundRect">
+            <a:avLst>
+              <a:gd name="adj" fmla="val 10000"/>
+            </a:avLst>
+          </a:prstGeom>
+          <a:solidFill>
+            <a:srgbClr val="FFFCF6"/>
+          </a:solidFill>
+          <a:ln>
+            <a:noFill/>
+          </a:ln>
+        </p:spPr>
+        <p:style>
+          <a:lnRef idx="1">
+            <a:schemeClr val="accent1"/>
+          </a:lnRef>
+          <a:fillRef idx="3">
+            <a:schemeClr val="accent1"/>
+          </a:fillRef>
+          <a:effectRef idx="2">
+            <a:schemeClr val="accent1"/>
+          </a:effectRef>
+          <a:fontRef idx="minor">
+            <a:schemeClr val="lt1"/>
+          </a:fontRef>
+        </p:style>
+        <p:txBody>
+          <a:bodyPr rtlCol="0" anchor="ctr"/>
+          <a:lstStyle/>
+          <a:p>
+            <a:pPr algn="ctr"/>
+          </a:p>
+        </p:txBody>
+      </p:sp>
+      <p:sp>
+        <p:nvSpPr>
+          <p:cNvPr id="32" name="TextBox 31"/>
+          <p:cNvSpPr txBox="1"/>
+          <p:nvPr/>
+        </p:nvSpPr>
+        <p:spPr>
+          <a:xfrm>
+            <a:off x="8321040" y="4206240"/>
+            <a:ext cx="3291840" cy="320040"/>
+          </a:xfrm>
+          <a:prstGeom prst="rect">
+            <a:avLst/>
+          </a:prstGeom>
+          <a:noFill/>
+        </p:spPr>
+        <p:txBody>
+          <a:bodyPr wrap="square" anchor="t">
+            <a:spAutoFit/>
+          </a:bodyPr>
+          <a:lstStyle/>
+          <a:p>
+            <a:pPr algn="l"/>
+            <a:r>
+              <a:rPr sz="1600" b="1">
+                <a:solidFill>
+                  <a:srgbClr val="E8B43A"/>
+                </a:solidFill>
+                <a:latin typeface="Verdana"/>
+                <a:ea typeface="Verdana"/>
+                <a:cs typeface="Verdana"/>
+              </a:rPr>
+              <a:t>06</a:t>
+            </a:r>
+          </a:p>
+        </p:txBody>
+      </p:sp>
+      <p:sp>
+        <p:nvSpPr>
+          <p:cNvPr id="33" name="TextBox 32"/>
+          <p:cNvSpPr txBox="1"/>
+          <p:nvPr/>
+        </p:nvSpPr>
+        <p:spPr>
+          <a:xfrm>
+            <a:off x="8321040" y="4526280"/>
+            <a:ext cx="3291840" cy="502920"/>
+          </a:xfrm>
+          <a:prstGeom prst="rect">
+            <a:avLst/>
+          </a:prstGeom>
+          <a:noFill/>
+        </p:spPr>
+        <p:txBody>
+          <a:bodyPr wrap="square" anchor="t">
+            <a:spAutoFit/>
+          </a:bodyPr>
+          <a:lstStyle/>
+          <a:p>
+            <a:pPr algn="l"/>
+            <a:r>
+              <a:rPr sz="1400" b="1">
+                <a:solidFill>
+                  <a:srgbClr val="1A1A1A"/>
+                </a:solidFill>
+                <a:latin typeface="Verdana"/>
+                <a:ea typeface="Verdana"/>
+                <a:cs typeface="Verdana"/>
+              </a:rPr>
+              <a:t>Низкий риск следующего шага</a:t>
+            </a:r>
+          </a:p>
+        </p:txBody>
+      </p:sp>
+      <p:sp>
+        <p:nvSpPr>
+          <p:cNvPr id="34" name="TextBox 33"/>
+          <p:cNvSpPr txBox="1"/>
+          <p:nvPr/>
+        </p:nvSpPr>
+        <p:spPr>
+          <a:xfrm>
+            <a:off x="8321040" y="5074920"/>
+            <a:ext cx="3291840" cy="822960"/>
+          </a:xfrm>
+          <a:prstGeom prst="rect">
+            <a:avLst/>
+          </a:prstGeom>
+          <a:noFill/>
+        </p:spPr>
+        <p:txBody>
+          <a:bodyPr wrap="square" anchor="t">
+            <a:spAutoFit/>
+          </a:bodyPr>
+          <a:lstStyle/>
+          <a:p>
+            <a:pPr algn="l"/>
+            <a:r>
+              <a:rPr sz="1200" b="0">
+                <a:solidFill>
+                  <a:srgbClr val="5C5C5C"/>
+                </a:solidFill>
+                <a:latin typeface="Verdana"/>
+                <a:ea typeface="Verdana"/>
+                <a:cs typeface="Verdana"/>
+              </a:rPr>
+              <a:t>Бесплатное демо или пилот на 3 месяца — безопасный способ «пожить» в сервисе до оплаты. Это и есть мост от интереса к решению.</a:t>
+            </a:r>
+          </a:p>
+        </p:txBody>
+      </p:sp>
+      <p:sp>
+        <p:nvSpPr>
+          <p:cNvPr id="35" name="Rectangle 34"/>
+          <p:cNvSpPr/>
+          <p:nvPr/>
+        </p:nvSpPr>
+        <p:spPr>
+          <a:xfrm>
+            <a:off x="0" y="6656832"/>
+            <a:ext cx="12191695" cy="201168"/>
+          </a:xfrm>
+          <a:prstGeom prst="rect">
+            <a:avLst/>
+          </a:prstGeom>
+          <a:solidFill>
+            <a:srgbClr val="FECF68"/>
+          </a:solidFill>
+          <a:ln>
+            <a:noFill/>
+          </a:ln>
+        </p:spPr>
+        <p:style>
+          <a:lnRef idx="1">
+            <a:schemeClr val="accent1"/>
+          </a:lnRef>
+          <a:fillRef idx="3">
+            <a:schemeClr val="accent1"/>
+          </a:fillRef>
+          <a:effectRef idx="2">
+            <a:schemeClr val="accent1"/>
+          </a:effectRef>
+          <a:fontRef idx="minor">
+            <a:schemeClr val="lt1"/>
+          </a:fontRef>
+        </p:style>
+        <p:txBody>
+          <a:bodyPr rtlCol="0" anchor="ctr"/>
+          <a:lstStyle/>
+          <a:p>
+            <a:pPr algn="ctr"/>
+          </a:p>
+        </p:txBody>
+      </p:sp>
+      <p:sp>
+        <p:nvSpPr>
+          <p:cNvPr id="36" name="TextBox 35"/>
+          <p:cNvSpPr txBox="1"/>
+          <p:nvPr/>
+        </p:nvSpPr>
+        <p:spPr>
+          <a:xfrm>
+            <a:off x="457200" y="6473952"/>
+            <a:ext cx="8412480" cy="201168"/>
+          </a:xfrm>
+          <a:prstGeom prst="rect">
+            <a:avLst/>
+          </a:prstGeom>
+          <a:noFill/>
+        </p:spPr>
+        <p:txBody>
+          <a:bodyPr wrap="square" anchor="t">
+            <a:spAutoFit/>
+          </a:bodyPr>
+          <a:lstStyle/>
+          <a:p>
+            <a:pPr algn="l"/>
+            <a:r>
+              <a:rPr sz="900" b="0">
+                <a:solidFill>
+                  <a:srgbClr val="5C5C5C"/>
+                </a:solidFill>
+                <a:latin typeface="Verdana"/>
+                <a:ea typeface="Verdana"/>
+                <a:cs typeface="Verdana"/>
+              </a:rPr>
+              <a:t>ГК Форус  ·  рабочая группа  ·  1С:Кабинет сотрудника</a:t>
+            </a:r>
+          </a:p>
+        </p:txBody>
+      </p:sp>
+      <p:sp>
+        <p:nvSpPr>
+          <p:cNvPr id="37" name="TextBox 36"/>
+          <p:cNvSpPr txBox="1"/>
+          <p:nvPr/>
+        </p:nvSpPr>
+        <p:spPr>
+          <a:xfrm>
+            <a:off x="10424160" y="6473952"/>
+            <a:ext cx="1280160" cy="201168"/>
+          </a:xfrm>
+          <a:prstGeom prst="rect">
+            <a:avLst/>
+          </a:prstGeom>
+          <a:noFill/>
+        </p:spPr>
+        <p:txBody>
+          <a:bodyPr wrap="square" anchor="t">
+            <a:spAutoFit/>
+          </a:bodyPr>
+          <a:lstStyle/>
+          <a:p>
+            <a:pPr algn="r"/>
+            <a:r>
+              <a:rPr sz="900" b="0">
+                <a:solidFill>
+                  <a:srgbClr val="5C5C5C"/>
+                </a:solidFill>
+                <a:latin typeface="Verdana"/>
+                <a:ea typeface="Verdana"/>
+                <a:cs typeface="Verdana"/>
+              </a:rPr>
+              <a:t>8 / 8</a:t>
             </a:r>
           </a:p>
         </p:txBody>
